--- a/Slide/MicroController/10.Interrupt.pptx
+++ b/Slide/MicroController/10.Interrupt.pptx
@@ -7,9 +7,11 @@
   <p:sldIdLst>
     <p:sldId id="256" r:id="rId2"/>
     <p:sldId id="285" r:id="rId3"/>
-    <p:sldId id="284" r:id="rId4"/>
-    <p:sldId id="286" r:id="rId5"/>
-    <p:sldId id="283" r:id="rId6"/>
+    <p:sldId id="287" r:id="rId4"/>
+    <p:sldId id="288" r:id="rId5"/>
+    <p:sldId id="284" r:id="rId6"/>
+    <p:sldId id="286" r:id="rId7"/>
+    <p:sldId id="283" r:id="rId8"/>
   </p:sldIdLst>
   <p:sldSz cx="12192000" cy="6858000"/>
   <p:notesSz cx="6858000" cy="9144000"/>
@@ -256,7 +258,7 @@
           <a:p>
             <a:fld id="{ECA3AE87-C17F-4F2C-92FF-7FE21F8A66BE}" type="datetimeFigureOut">
               <a:rPr lang="en-US" smtClean="0"/>
-              <a:t>2/13/2025</a:t>
+              <a:t>9/30/2025</a:t>
             </a:fld>
             <a:endParaRPr lang="en-US"/>
           </a:p>
@@ -424,7 +426,7 @@
           <a:p>
             <a:fld id="{ECA3AE87-C17F-4F2C-92FF-7FE21F8A66BE}" type="datetimeFigureOut">
               <a:rPr lang="en-US" smtClean="0"/>
-              <a:t>2/13/2025</a:t>
+              <a:t>9/30/2025</a:t>
             </a:fld>
             <a:endParaRPr lang="en-US"/>
           </a:p>
@@ -602,7 +604,7 @@
           <a:p>
             <a:fld id="{ECA3AE87-C17F-4F2C-92FF-7FE21F8A66BE}" type="datetimeFigureOut">
               <a:rPr lang="en-US" smtClean="0"/>
-              <a:t>2/13/2025</a:t>
+              <a:t>9/30/2025</a:t>
             </a:fld>
             <a:endParaRPr lang="en-US"/>
           </a:p>
@@ -770,7 +772,7 @@
           <a:p>
             <a:fld id="{ECA3AE87-C17F-4F2C-92FF-7FE21F8A66BE}" type="datetimeFigureOut">
               <a:rPr lang="en-US" smtClean="0"/>
-              <a:t>2/13/2025</a:t>
+              <a:t>9/30/2025</a:t>
             </a:fld>
             <a:endParaRPr lang="en-US"/>
           </a:p>
@@ -1015,7 +1017,7 @@
           <a:p>
             <a:fld id="{ECA3AE87-C17F-4F2C-92FF-7FE21F8A66BE}" type="datetimeFigureOut">
               <a:rPr lang="en-US" smtClean="0"/>
-              <a:t>2/13/2025</a:t>
+              <a:t>9/30/2025</a:t>
             </a:fld>
             <a:endParaRPr lang="en-US"/>
           </a:p>
@@ -1244,7 +1246,7 @@
           <a:p>
             <a:fld id="{ECA3AE87-C17F-4F2C-92FF-7FE21F8A66BE}" type="datetimeFigureOut">
               <a:rPr lang="en-US" smtClean="0"/>
-              <a:t>2/13/2025</a:t>
+              <a:t>9/30/2025</a:t>
             </a:fld>
             <a:endParaRPr lang="en-US"/>
           </a:p>
@@ -1608,7 +1610,7 @@
           <a:p>
             <a:fld id="{ECA3AE87-C17F-4F2C-92FF-7FE21F8A66BE}" type="datetimeFigureOut">
               <a:rPr lang="en-US" smtClean="0"/>
-              <a:t>2/13/2025</a:t>
+              <a:t>9/30/2025</a:t>
             </a:fld>
             <a:endParaRPr lang="en-US"/>
           </a:p>
@@ -1725,7 +1727,7 @@
           <a:p>
             <a:fld id="{ECA3AE87-C17F-4F2C-92FF-7FE21F8A66BE}" type="datetimeFigureOut">
               <a:rPr lang="en-US" smtClean="0"/>
-              <a:t>2/13/2025</a:t>
+              <a:t>9/30/2025</a:t>
             </a:fld>
             <a:endParaRPr lang="en-US"/>
           </a:p>
@@ -1820,7 +1822,7 @@
           <a:p>
             <a:fld id="{ECA3AE87-C17F-4F2C-92FF-7FE21F8A66BE}" type="datetimeFigureOut">
               <a:rPr lang="en-US" smtClean="0"/>
-              <a:t>2/13/2025</a:t>
+              <a:t>9/30/2025</a:t>
             </a:fld>
             <a:endParaRPr lang="en-US"/>
           </a:p>
@@ -2095,7 +2097,7 @@
           <a:p>
             <a:fld id="{ECA3AE87-C17F-4F2C-92FF-7FE21F8A66BE}" type="datetimeFigureOut">
               <a:rPr lang="en-US" smtClean="0"/>
-              <a:t>2/13/2025</a:t>
+              <a:t>9/30/2025</a:t>
             </a:fld>
             <a:endParaRPr lang="en-US"/>
           </a:p>
@@ -2347,7 +2349,7 @@
           <a:p>
             <a:fld id="{ECA3AE87-C17F-4F2C-92FF-7FE21F8A66BE}" type="datetimeFigureOut">
               <a:rPr lang="en-US" smtClean="0"/>
-              <a:t>2/13/2025</a:t>
+              <a:t>9/30/2025</a:t>
             </a:fld>
             <a:endParaRPr lang="en-US"/>
           </a:p>
@@ -2558,7 +2560,7 @@
           <a:p>
             <a:fld id="{ECA3AE87-C17F-4F2C-92FF-7FE21F8A66BE}" type="datetimeFigureOut">
               <a:rPr lang="en-US" smtClean="0"/>
-              <a:t>2/13/2025</a:t>
+              <a:t>9/30/2025</a:t>
             </a:fld>
             <a:endParaRPr lang="en-US"/>
           </a:p>
@@ -3485,13 +3487,15 @@
               </a:ext>
             </a:extLst>
           </p:cNvPr>
-          <p:cNvCxnSpPr/>
+          <p:cNvCxnSpPr>
+            <a:cxnSpLocks/>
+          </p:cNvCxnSpPr>
           <p:nvPr/>
         </p:nvCxnSpPr>
         <p:spPr>
           <a:xfrm flipV="1">
-            <a:off x="2769080" y="4056041"/>
-            <a:ext cx="2087592" cy="474453"/>
+            <a:off x="2769080" y="3965083"/>
+            <a:ext cx="1987478" cy="565412"/>
           </a:xfrm>
           <a:prstGeom prst="straightConnector1">
             <a:avLst/>
@@ -3579,7 +3583,7 @@
           <a:lstStyle/>
           <a:p>
             <a:r>
-              <a:rPr lang="en-US"/>
+              <a:rPr lang="en-US" dirty="0"/>
               <a:t>ISR: interrupt service routine</a:t>
             </a:r>
           </a:p>
@@ -3600,9 +3604,9 @@
           <p:nvPr/>
         </p:nvCxnSpPr>
         <p:spPr>
-          <a:xfrm flipH="1" flipV="1">
-            <a:off x="2380355" y="4950898"/>
-            <a:ext cx="2635367" cy="64330"/>
+          <a:xfrm flipH="1">
+            <a:off x="2416029" y="5015228"/>
+            <a:ext cx="2599694" cy="36318"/>
           </a:xfrm>
           <a:prstGeom prst="straightConnector1">
             <a:avLst/>
@@ -3685,6 +3689,1746 @@
   <p:cSld>
     <p:spTree>
       <p:nvGrpSpPr>
+        <p:cNvPr id="1" name=""/>
+        <p:cNvGrpSpPr/>
+        <p:nvPr/>
+      </p:nvGrpSpPr>
+      <p:grpSpPr>
+        <a:xfrm>
+          <a:off x="0" y="0"/>
+          <a:ext cx="0" cy="0"/>
+          <a:chOff x="0" y="0"/>
+          <a:chExt cx="0" cy="0"/>
+        </a:xfrm>
+      </p:grpSpPr>
+      <p:sp>
+        <p:nvSpPr>
+          <p:cNvPr id="4" name="Rectangle 3">
+            <a:extLst>
+              <a:ext uri="{FF2B5EF4-FFF2-40B4-BE49-F238E27FC236}">
+                <a16:creationId xmlns:a16="http://schemas.microsoft.com/office/drawing/2014/main" id="{C6076378-B723-42A5-95C0-E9AC2F7CD3C8}"/>
+              </a:ext>
+            </a:extLst>
+          </p:cNvPr>
+          <p:cNvSpPr/>
+          <p:nvPr/>
+        </p:nvSpPr>
+        <p:spPr>
+          <a:xfrm>
+            <a:off x="1199624" y="2571477"/>
+            <a:ext cx="3456265" cy="1992134"/>
+          </a:xfrm>
+          <a:prstGeom prst="rect">
+            <a:avLst/>
+          </a:prstGeom>
+        </p:spPr>
+        <p:style>
+          <a:lnRef idx="2">
+            <a:schemeClr val="accent1">
+              <a:shade val="50000"/>
+            </a:schemeClr>
+          </a:lnRef>
+          <a:fillRef idx="1">
+            <a:schemeClr val="accent1"/>
+          </a:fillRef>
+          <a:effectRef idx="0">
+            <a:schemeClr val="accent1"/>
+          </a:effectRef>
+          <a:fontRef idx="minor">
+            <a:schemeClr val="lt1"/>
+          </a:fontRef>
+        </p:style>
+        <p:txBody>
+          <a:bodyPr rtlCol="0" anchor="ctr"/>
+          <a:lstStyle/>
+          <a:p>
+            <a:pPr algn="ctr"/>
+            <a:r>
+              <a:rPr lang="en-US" dirty="0"/>
+              <a:t>CPU</a:t>
+            </a:r>
+          </a:p>
+        </p:txBody>
+      </p:sp>
+      <p:sp>
+        <p:nvSpPr>
+          <p:cNvPr id="5" name="TextBox 4">
+            <a:extLst>
+              <a:ext uri="{FF2B5EF4-FFF2-40B4-BE49-F238E27FC236}">
+                <a16:creationId xmlns:a16="http://schemas.microsoft.com/office/drawing/2014/main" id="{9E7C6C8D-7A5B-44B8-AC02-A0BD4F9965EC}"/>
+              </a:ext>
+            </a:extLst>
+          </p:cNvPr>
+          <p:cNvSpPr txBox="1"/>
+          <p:nvPr/>
+        </p:nvSpPr>
+        <p:spPr>
+          <a:xfrm>
+            <a:off x="1551963" y="276837"/>
+            <a:ext cx="2139192" cy="1200329"/>
+          </a:xfrm>
+          <a:prstGeom prst="rect">
+            <a:avLst/>
+          </a:prstGeom>
+          <a:noFill/>
+        </p:spPr>
+        <p:txBody>
+          <a:bodyPr wrap="square" rtlCol="0">
+            <a:spAutoFit/>
+          </a:bodyPr>
+          <a:lstStyle/>
+          <a:p>
+            <a:r>
+              <a:rPr lang="en-US" dirty="0"/>
+              <a:t>CPU</a:t>
+            </a:r>
+          </a:p>
+          <a:p>
+            <a:r>
+              <a:rPr lang="en-US" dirty="0"/>
+              <a:t>Core</a:t>
+            </a:r>
+          </a:p>
+          <a:p>
+            <a:r>
+              <a:rPr lang="en-US" dirty="0"/>
+              <a:t>SoC</a:t>
+            </a:r>
+          </a:p>
+          <a:p>
+            <a:r>
+              <a:rPr lang="en-US" dirty="0" err="1"/>
+              <a:t>uC-uP</a:t>
+            </a:r>
+            <a:endParaRPr lang="en-US" dirty="0"/>
+          </a:p>
+        </p:txBody>
+      </p:sp>
+      <p:sp>
+        <p:nvSpPr>
+          <p:cNvPr id="6" name="Rectangle 5">
+            <a:extLst>
+              <a:ext uri="{FF2B5EF4-FFF2-40B4-BE49-F238E27FC236}">
+                <a16:creationId xmlns:a16="http://schemas.microsoft.com/office/drawing/2014/main" id="{FABE7F57-CF4D-4DC0-B915-C50DD9E48CB9}"/>
+              </a:ext>
+            </a:extLst>
+          </p:cNvPr>
+          <p:cNvSpPr/>
+          <p:nvPr/>
+        </p:nvSpPr>
+        <p:spPr>
+          <a:xfrm>
+            <a:off x="5715702" y="1167467"/>
+            <a:ext cx="2986480" cy="1853967"/>
+          </a:xfrm>
+          <a:prstGeom prst="rect">
+            <a:avLst/>
+          </a:prstGeom>
+          <a:solidFill>
+            <a:srgbClr val="00B050"/>
+          </a:solidFill>
+        </p:spPr>
+        <p:style>
+          <a:lnRef idx="2">
+            <a:schemeClr val="accent1">
+              <a:shade val="50000"/>
+            </a:schemeClr>
+          </a:lnRef>
+          <a:fillRef idx="1">
+            <a:schemeClr val="accent1"/>
+          </a:fillRef>
+          <a:effectRef idx="0">
+            <a:schemeClr val="accent1"/>
+          </a:effectRef>
+          <a:fontRef idx="minor">
+            <a:schemeClr val="lt1"/>
+          </a:fontRef>
+        </p:style>
+        <p:txBody>
+          <a:bodyPr rtlCol="0" anchor="ctr"/>
+          <a:lstStyle/>
+          <a:p>
+            <a:pPr algn="ctr"/>
+            <a:r>
+              <a:rPr lang="en-US" dirty="0"/>
+              <a:t>Memory</a:t>
+            </a:r>
+          </a:p>
+        </p:txBody>
+      </p:sp>
+      <p:sp>
+        <p:nvSpPr>
+          <p:cNvPr id="7" name="Rectangle 6">
+            <a:extLst>
+              <a:ext uri="{FF2B5EF4-FFF2-40B4-BE49-F238E27FC236}">
+                <a16:creationId xmlns:a16="http://schemas.microsoft.com/office/drawing/2014/main" id="{5E496834-3903-4ED1-9614-9E03C52F0741}"/>
+              </a:ext>
+            </a:extLst>
+          </p:cNvPr>
+          <p:cNvSpPr/>
+          <p:nvPr/>
+        </p:nvSpPr>
+        <p:spPr>
+          <a:xfrm>
+            <a:off x="5715702" y="4991450"/>
+            <a:ext cx="1473663" cy="1177254"/>
+          </a:xfrm>
+          <a:prstGeom prst="rect">
+            <a:avLst/>
+          </a:prstGeom>
+          <a:solidFill>
+            <a:srgbClr val="FFC000"/>
+          </a:solidFill>
+        </p:spPr>
+        <p:style>
+          <a:lnRef idx="2">
+            <a:schemeClr val="accent1">
+              <a:shade val="50000"/>
+            </a:schemeClr>
+          </a:lnRef>
+          <a:fillRef idx="1">
+            <a:schemeClr val="accent1"/>
+          </a:fillRef>
+          <a:effectRef idx="0">
+            <a:schemeClr val="accent1"/>
+          </a:effectRef>
+          <a:fontRef idx="minor">
+            <a:schemeClr val="lt1"/>
+          </a:fontRef>
+        </p:style>
+        <p:txBody>
+          <a:bodyPr rtlCol="0" anchor="ctr"/>
+          <a:lstStyle/>
+          <a:p>
+            <a:pPr algn="ctr"/>
+            <a:r>
+              <a:rPr lang="en-US" dirty="0"/>
+              <a:t>I/O</a:t>
+            </a:r>
+          </a:p>
+        </p:txBody>
+      </p:sp>
+      <p:sp>
+        <p:nvSpPr>
+          <p:cNvPr id="8" name="Rectangle 7">
+            <a:extLst>
+              <a:ext uri="{FF2B5EF4-FFF2-40B4-BE49-F238E27FC236}">
+                <a16:creationId xmlns:a16="http://schemas.microsoft.com/office/drawing/2014/main" id="{DBA68014-48F9-4D77-9AE4-457D3F0CF7F1}"/>
+              </a:ext>
+            </a:extLst>
+          </p:cNvPr>
+          <p:cNvSpPr/>
+          <p:nvPr/>
+        </p:nvSpPr>
+        <p:spPr>
+          <a:xfrm>
+            <a:off x="7462011" y="4991450"/>
+            <a:ext cx="1473663" cy="1177254"/>
+          </a:xfrm>
+          <a:prstGeom prst="rect">
+            <a:avLst/>
+          </a:prstGeom>
+          <a:solidFill>
+            <a:srgbClr val="FFC000"/>
+          </a:solidFill>
+        </p:spPr>
+        <p:style>
+          <a:lnRef idx="2">
+            <a:schemeClr val="accent1">
+              <a:shade val="50000"/>
+            </a:schemeClr>
+          </a:lnRef>
+          <a:fillRef idx="1">
+            <a:schemeClr val="accent1"/>
+          </a:fillRef>
+          <a:effectRef idx="0">
+            <a:schemeClr val="accent1"/>
+          </a:effectRef>
+          <a:fontRef idx="minor">
+            <a:schemeClr val="lt1"/>
+          </a:fontRef>
+        </p:style>
+        <p:txBody>
+          <a:bodyPr rtlCol="0" anchor="ctr"/>
+          <a:lstStyle/>
+          <a:p>
+            <a:pPr algn="ctr"/>
+            <a:r>
+              <a:rPr lang="en-US" dirty="0"/>
+              <a:t>I/O</a:t>
+            </a:r>
+          </a:p>
+        </p:txBody>
+      </p:sp>
+      <p:sp>
+        <p:nvSpPr>
+          <p:cNvPr id="9" name="Rectangle 8">
+            <a:extLst>
+              <a:ext uri="{FF2B5EF4-FFF2-40B4-BE49-F238E27FC236}">
+                <a16:creationId xmlns:a16="http://schemas.microsoft.com/office/drawing/2014/main" id="{B6EA9A58-D0F2-4BFD-A1F1-533543FA61DB}"/>
+              </a:ext>
+            </a:extLst>
+          </p:cNvPr>
+          <p:cNvSpPr/>
+          <p:nvPr/>
+        </p:nvSpPr>
+        <p:spPr>
+          <a:xfrm>
+            <a:off x="9468378" y="4991450"/>
+            <a:ext cx="1473663" cy="1177254"/>
+          </a:xfrm>
+          <a:prstGeom prst="rect">
+            <a:avLst/>
+          </a:prstGeom>
+          <a:solidFill>
+            <a:srgbClr val="FFC000"/>
+          </a:solidFill>
+        </p:spPr>
+        <p:style>
+          <a:lnRef idx="2">
+            <a:schemeClr val="accent1">
+              <a:shade val="50000"/>
+            </a:schemeClr>
+          </a:lnRef>
+          <a:fillRef idx="1">
+            <a:schemeClr val="accent1"/>
+          </a:fillRef>
+          <a:effectRef idx="0">
+            <a:schemeClr val="accent1"/>
+          </a:effectRef>
+          <a:fontRef idx="minor">
+            <a:schemeClr val="lt1"/>
+          </a:fontRef>
+        </p:style>
+        <p:txBody>
+          <a:bodyPr rtlCol="0" anchor="ctr"/>
+          <a:lstStyle/>
+          <a:p>
+            <a:pPr algn="ctr"/>
+            <a:r>
+              <a:rPr lang="en-US" dirty="0"/>
+              <a:t>I/O</a:t>
+            </a:r>
+          </a:p>
+        </p:txBody>
+      </p:sp>
+      <p:sp>
+        <p:nvSpPr>
+          <p:cNvPr id="10" name="TextBox 9">
+            <a:extLst>
+              <a:ext uri="{FF2B5EF4-FFF2-40B4-BE49-F238E27FC236}">
+                <a16:creationId xmlns:a16="http://schemas.microsoft.com/office/drawing/2014/main" id="{F66F6055-282D-4340-88A5-215C968797CA}"/>
+              </a:ext>
+            </a:extLst>
+          </p:cNvPr>
+          <p:cNvSpPr txBox="1"/>
+          <p:nvPr/>
+        </p:nvSpPr>
+        <p:spPr>
+          <a:xfrm>
+            <a:off x="2374084" y="2094450"/>
+            <a:ext cx="1115909" cy="369332"/>
+          </a:xfrm>
+          <a:prstGeom prst="rect">
+            <a:avLst/>
+          </a:prstGeom>
+          <a:noFill/>
+        </p:spPr>
+        <p:txBody>
+          <a:bodyPr wrap="square" rtlCol="0">
+            <a:spAutoFit/>
+          </a:bodyPr>
+          <a:lstStyle/>
+          <a:p>
+            <a:r>
+              <a:rPr lang="en-US" dirty="0"/>
+              <a:t>SoC</a:t>
+            </a:r>
+          </a:p>
+        </p:txBody>
+      </p:sp>
+      <p:sp>
+        <p:nvSpPr>
+          <p:cNvPr id="12" name="Rectangle 11">
+            <a:extLst>
+              <a:ext uri="{FF2B5EF4-FFF2-40B4-BE49-F238E27FC236}">
+                <a16:creationId xmlns:a16="http://schemas.microsoft.com/office/drawing/2014/main" id="{68DAE247-67C2-4EA0-840A-6E23382ADCA3}"/>
+              </a:ext>
+            </a:extLst>
+          </p:cNvPr>
+          <p:cNvSpPr/>
+          <p:nvPr/>
+        </p:nvSpPr>
+        <p:spPr>
+          <a:xfrm>
+            <a:off x="1551963" y="2768719"/>
+            <a:ext cx="822121" cy="479570"/>
+          </a:xfrm>
+          <a:prstGeom prst="rect">
+            <a:avLst/>
+          </a:prstGeom>
+        </p:spPr>
+        <p:style>
+          <a:lnRef idx="2">
+            <a:schemeClr val="accent2">
+              <a:shade val="50000"/>
+            </a:schemeClr>
+          </a:lnRef>
+          <a:fillRef idx="1">
+            <a:schemeClr val="accent2"/>
+          </a:fillRef>
+          <a:effectRef idx="0">
+            <a:schemeClr val="accent2"/>
+          </a:effectRef>
+          <a:fontRef idx="minor">
+            <a:schemeClr val="lt1"/>
+          </a:fontRef>
+        </p:style>
+        <p:txBody>
+          <a:bodyPr rtlCol="0" anchor="ctr"/>
+          <a:lstStyle/>
+          <a:p>
+            <a:pPr algn="ctr"/>
+            <a:r>
+              <a:rPr lang="en-US" dirty="0"/>
+              <a:t>Timer</a:t>
+            </a:r>
+          </a:p>
+        </p:txBody>
+      </p:sp>
+      <p:sp>
+        <p:nvSpPr>
+          <p:cNvPr id="13" name="Rectangle 12">
+            <a:extLst>
+              <a:ext uri="{FF2B5EF4-FFF2-40B4-BE49-F238E27FC236}">
+                <a16:creationId xmlns:a16="http://schemas.microsoft.com/office/drawing/2014/main" id="{CDEA5DED-D55C-41AD-84FF-A60B8DE43C6D}"/>
+              </a:ext>
+            </a:extLst>
+          </p:cNvPr>
+          <p:cNvSpPr/>
+          <p:nvPr/>
+        </p:nvSpPr>
+        <p:spPr>
+          <a:xfrm>
+            <a:off x="2592897" y="2745156"/>
+            <a:ext cx="822121" cy="479570"/>
+          </a:xfrm>
+          <a:prstGeom prst="rect">
+            <a:avLst/>
+          </a:prstGeom>
+        </p:spPr>
+        <p:style>
+          <a:lnRef idx="2">
+            <a:schemeClr val="accent2">
+              <a:shade val="50000"/>
+            </a:schemeClr>
+          </a:lnRef>
+          <a:fillRef idx="1">
+            <a:schemeClr val="accent2"/>
+          </a:fillRef>
+          <a:effectRef idx="0">
+            <a:schemeClr val="accent2"/>
+          </a:effectRef>
+          <a:fontRef idx="minor">
+            <a:schemeClr val="lt1"/>
+          </a:fontRef>
+        </p:style>
+        <p:txBody>
+          <a:bodyPr rtlCol="0" anchor="ctr"/>
+          <a:lstStyle/>
+          <a:p>
+            <a:pPr algn="ctr"/>
+            <a:r>
+              <a:rPr lang="en-US" dirty="0"/>
+              <a:t>Debug</a:t>
+            </a:r>
+          </a:p>
+        </p:txBody>
+      </p:sp>
+      <p:sp>
+        <p:nvSpPr>
+          <p:cNvPr id="14" name="Rectangle 13">
+            <a:extLst>
+              <a:ext uri="{FF2B5EF4-FFF2-40B4-BE49-F238E27FC236}">
+                <a16:creationId xmlns:a16="http://schemas.microsoft.com/office/drawing/2014/main" id="{70E7B39F-2065-48EE-8C73-8937FAC8CEBC}"/>
+              </a:ext>
+            </a:extLst>
+          </p:cNvPr>
+          <p:cNvSpPr/>
+          <p:nvPr/>
+        </p:nvSpPr>
+        <p:spPr>
+          <a:xfrm>
+            <a:off x="1440109" y="3503102"/>
+            <a:ext cx="822121" cy="479570"/>
+          </a:xfrm>
+          <a:prstGeom prst="rect">
+            <a:avLst/>
+          </a:prstGeom>
+        </p:spPr>
+        <p:style>
+          <a:lnRef idx="2">
+            <a:schemeClr val="accent2">
+              <a:shade val="50000"/>
+            </a:schemeClr>
+          </a:lnRef>
+          <a:fillRef idx="1">
+            <a:schemeClr val="accent2"/>
+          </a:fillRef>
+          <a:effectRef idx="0">
+            <a:schemeClr val="accent2"/>
+          </a:effectRef>
+          <a:fontRef idx="minor">
+            <a:schemeClr val="lt1"/>
+          </a:fontRef>
+        </p:style>
+        <p:txBody>
+          <a:bodyPr rtlCol="0" anchor="ctr"/>
+          <a:lstStyle/>
+          <a:p>
+            <a:pPr algn="ctr"/>
+            <a:r>
+              <a:rPr lang="en-US" dirty="0"/>
+              <a:t>NVIC</a:t>
+            </a:r>
+          </a:p>
+        </p:txBody>
+      </p:sp>
+      <p:sp>
+        <p:nvSpPr>
+          <p:cNvPr id="16" name="Rectangle 15">
+            <a:extLst>
+              <a:ext uri="{FF2B5EF4-FFF2-40B4-BE49-F238E27FC236}">
+                <a16:creationId xmlns:a16="http://schemas.microsoft.com/office/drawing/2014/main" id="{C250E7F1-6DE7-4BA7-A9AA-3F4E76B7A971}"/>
+              </a:ext>
+            </a:extLst>
+          </p:cNvPr>
+          <p:cNvSpPr/>
+          <p:nvPr/>
+        </p:nvSpPr>
+        <p:spPr>
+          <a:xfrm>
+            <a:off x="2667873" y="3982671"/>
+            <a:ext cx="795558" cy="303607"/>
+          </a:xfrm>
+          <a:prstGeom prst="rect">
+            <a:avLst/>
+          </a:prstGeom>
+        </p:spPr>
+        <p:style>
+          <a:lnRef idx="2">
+            <a:schemeClr val="accent6">
+              <a:shade val="50000"/>
+            </a:schemeClr>
+          </a:lnRef>
+          <a:fillRef idx="1">
+            <a:schemeClr val="accent6"/>
+          </a:fillRef>
+          <a:effectRef idx="0">
+            <a:schemeClr val="accent6"/>
+          </a:effectRef>
+          <a:fontRef idx="minor">
+            <a:schemeClr val="lt1"/>
+          </a:fontRef>
+        </p:style>
+        <p:txBody>
+          <a:bodyPr rtlCol="0" anchor="ctr"/>
+          <a:lstStyle/>
+          <a:p>
+            <a:pPr algn="ctr"/>
+            <a:r>
+              <a:rPr lang="en-US" dirty="0"/>
+              <a:t>Core</a:t>
+            </a:r>
+          </a:p>
+        </p:txBody>
+      </p:sp>
+      <p:sp>
+        <p:nvSpPr>
+          <p:cNvPr id="17" name="TextBox 16">
+            <a:extLst>
+              <a:ext uri="{FF2B5EF4-FFF2-40B4-BE49-F238E27FC236}">
+                <a16:creationId xmlns:a16="http://schemas.microsoft.com/office/drawing/2014/main" id="{5A328F0E-F061-4E9B-9C52-D1E2616E602D}"/>
+              </a:ext>
+            </a:extLst>
+          </p:cNvPr>
+          <p:cNvSpPr txBox="1"/>
+          <p:nvPr/>
+        </p:nvSpPr>
+        <p:spPr>
+          <a:xfrm>
+            <a:off x="1317072" y="5076983"/>
+            <a:ext cx="3112315" cy="646331"/>
+          </a:xfrm>
+          <a:prstGeom prst="rect">
+            <a:avLst/>
+          </a:prstGeom>
+          <a:noFill/>
+        </p:spPr>
+        <p:txBody>
+          <a:bodyPr wrap="square" rtlCol="0">
+            <a:spAutoFit/>
+          </a:bodyPr>
+          <a:lstStyle/>
+          <a:p>
+            <a:r>
+              <a:rPr lang="en-US" dirty="0"/>
+              <a:t>STM32F103: 1 core</a:t>
+            </a:r>
+          </a:p>
+          <a:p>
+            <a:r>
+              <a:rPr lang="en-US" dirty="0"/>
+              <a:t>STM newest: multi-core</a:t>
+            </a:r>
+          </a:p>
+        </p:txBody>
+      </p:sp>
+      <p:sp>
+        <p:nvSpPr>
+          <p:cNvPr id="18" name="Rectangle 17">
+            <a:extLst>
+              <a:ext uri="{FF2B5EF4-FFF2-40B4-BE49-F238E27FC236}">
+                <a16:creationId xmlns:a16="http://schemas.microsoft.com/office/drawing/2014/main" id="{226AA0BB-25BE-40EF-BC90-1ABC575EB515}"/>
+              </a:ext>
+            </a:extLst>
+          </p:cNvPr>
+          <p:cNvSpPr/>
+          <p:nvPr/>
+        </p:nvSpPr>
+        <p:spPr>
+          <a:xfrm>
+            <a:off x="3633832" y="2815412"/>
+            <a:ext cx="822120" cy="409313"/>
+          </a:xfrm>
+          <a:prstGeom prst="rect">
+            <a:avLst/>
+          </a:prstGeom>
+        </p:spPr>
+        <p:style>
+          <a:lnRef idx="2">
+            <a:schemeClr val="accent6">
+              <a:shade val="50000"/>
+            </a:schemeClr>
+          </a:lnRef>
+          <a:fillRef idx="1">
+            <a:schemeClr val="accent6"/>
+          </a:fillRef>
+          <a:effectRef idx="0">
+            <a:schemeClr val="accent6"/>
+          </a:effectRef>
+          <a:fontRef idx="minor">
+            <a:schemeClr val="lt1"/>
+          </a:fontRef>
+        </p:style>
+        <p:txBody>
+          <a:bodyPr rtlCol="0" anchor="ctr"/>
+          <a:lstStyle/>
+          <a:p>
+            <a:pPr algn="ctr"/>
+            <a:r>
+              <a:rPr lang="en-US" dirty="0"/>
+              <a:t>Core</a:t>
+            </a:r>
+          </a:p>
+        </p:txBody>
+      </p:sp>
+      <p:sp>
+        <p:nvSpPr>
+          <p:cNvPr id="19" name="Rectangle 18">
+            <a:extLst>
+              <a:ext uri="{FF2B5EF4-FFF2-40B4-BE49-F238E27FC236}">
+                <a16:creationId xmlns:a16="http://schemas.microsoft.com/office/drawing/2014/main" id="{B0DBA3F6-DEAC-42E0-96F9-F6EDE40D00E4}"/>
+              </a:ext>
+            </a:extLst>
+          </p:cNvPr>
+          <p:cNvSpPr/>
+          <p:nvPr/>
+        </p:nvSpPr>
+        <p:spPr>
+          <a:xfrm>
+            <a:off x="3633830" y="3874866"/>
+            <a:ext cx="795557" cy="409314"/>
+          </a:xfrm>
+          <a:prstGeom prst="rect">
+            <a:avLst/>
+          </a:prstGeom>
+        </p:spPr>
+        <p:style>
+          <a:lnRef idx="2">
+            <a:schemeClr val="accent6">
+              <a:shade val="50000"/>
+            </a:schemeClr>
+          </a:lnRef>
+          <a:fillRef idx="1">
+            <a:schemeClr val="accent6"/>
+          </a:fillRef>
+          <a:effectRef idx="0">
+            <a:schemeClr val="accent6"/>
+          </a:effectRef>
+          <a:fontRef idx="minor">
+            <a:schemeClr val="lt1"/>
+          </a:fontRef>
+        </p:style>
+        <p:txBody>
+          <a:bodyPr rtlCol="0" anchor="ctr"/>
+          <a:lstStyle/>
+          <a:p>
+            <a:pPr algn="ctr"/>
+            <a:r>
+              <a:rPr lang="en-US" dirty="0"/>
+              <a:t>Core</a:t>
+            </a:r>
+          </a:p>
+        </p:txBody>
+      </p:sp>
+    </p:spTree>
+    <p:extLst>
+      <p:ext uri="{BB962C8B-B14F-4D97-AF65-F5344CB8AC3E}">
+        <p14:creationId xmlns:p14="http://schemas.microsoft.com/office/powerpoint/2010/main" val="1933626905"/>
+      </p:ext>
+    </p:extLst>
+  </p:cSld>
+  <p:clrMapOvr>
+    <a:masterClrMapping/>
+  </p:clrMapOvr>
+</p:sld>
+</file>
+
+<file path=ppt/slides/slide4.xml><?xml version="1.0" encoding="utf-8"?>
+<p:sld xmlns:a="http://schemas.openxmlformats.org/drawingml/2006/main" xmlns:r="http://schemas.openxmlformats.org/officeDocument/2006/relationships" xmlns:p="http://schemas.openxmlformats.org/presentationml/2006/main">
+  <p:cSld>
+    <p:spTree>
+      <p:nvGrpSpPr>
+        <p:cNvPr id="1" name=""/>
+        <p:cNvGrpSpPr/>
+        <p:nvPr/>
+      </p:nvGrpSpPr>
+      <p:grpSpPr>
+        <a:xfrm>
+          <a:off x="0" y="0"/>
+          <a:ext cx="0" cy="0"/>
+          <a:chOff x="0" y="0"/>
+          <a:chExt cx="0" cy="0"/>
+        </a:xfrm>
+      </p:grpSpPr>
+      <p:sp>
+        <p:nvSpPr>
+          <p:cNvPr id="4" name="Rectangle 3">
+            <a:extLst>
+              <a:ext uri="{FF2B5EF4-FFF2-40B4-BE49-F238E27FC236}">
+                <a16:creationId xmlns:a16="http://schemas.microsoft.com/office/drawing/2014/main" id="{C6076378-B723-42A5-95C0-E9AC2F7CD3C8}"/>
+              </a:ext>
+            </a:extLst>
+          </p:cNvPr>
+          <p:cNvSpPr/>
+          <p:nvPr/>
+        </p:nvSpPr>
+        <p:spPr>
+          <a:xfrm>
+            <a:off x="1199624" y="2571477"/>
+            <a:ext cx="3456265" cy="1992134"/>
+          </a:xfrm>
+          <a:prstGeom prst="rect">
+            <a:avLst/>
+          </a:prstGeom>
+        </p:spPr>
+        <p:style>
+          <a:lnRef idx="2">
+            <a:schemeClr val="accent1">
+              <a:shade val="50000"/>
+            </a:schemeClr>
+          </a:lnRef>
+          <a:fillRef idx="1">
+            <a:schemeClr val="accent1"/>
+          </a:fillRef>
+          <a:effectRef idx="0">
+            <a:schemeClr val="accent1"/>
+          </a:effectRef>
+          <a:fontRef idx="minor">
+            <a:schemeClr val="lt1"/>
+          </a:fontRef>
+        </p:style>
+        <p:txBody>
+          <a:bodyPr rtlCol="0" anchor="ctr"/>
+          <a:lstStyle/>
+          <a:p>
+            <a:pPr algn="ctr"/>
+            <a:r>
+              <a:rPr lang="en-US" dirty="0"/>
+              <a:t>CPU</a:t>
+            </a:r>
+          </a:p>
+        </p:txBody>
+      </p:sp>
+      <p:sp>
+        <p:nvSpPr>
+          <p:cNvPr id="5" name="TextBox 4">
+            <a:extLst>
+              <a:ext uri="{FF2B5EF4-FFF2-40B4-BE49-F238E27FC236}">
+                <a16:creationId xmlns:a16="http://schemas.microsoft.com/office/drawing/2014/main" id="{9E7C6C8D-7A5B-44B8-AC02-A0BD4F9965EC}"/>
+              </a:ext>
+            </a:extLst>
+          </p:cNvPr>
+          <p:cNvSpPr txBox="1"/>
+          <p:nvPr/>
+        </p:nvSpPr>
+        <p:spPr>
+          <a:xfrm>
+            <a:off x="1551963" y="276837"/>
+            <a:ext cx="2139192" cy="1200329"/>
+          </a:xfrm>
+          <a:prstGeom prst="rect">
+            <a:avLst/>
+          </a:prstGeom>
+          <a:noFill/>
+        </p:spPr>
+        <p:txBody>
+          <a:bodyPr wrap="square" rtlCol="0">
+            <a:spAutoFit/>
+          </a:bodyPr>
+          <a:lstStyle/>
+          <a:p>
+            <a:r>
+              <a:rPr lang="en-US" dirty="0"/>
+              <a:t>CPU</a:t>
+            </a:r>
+          </a:p>
+          <a:p>
+            <a:r>
+              <a:rPr lang="en-US" dirty="0"/>
+              <a:t>Core</a:t>
+            </a:r>
+          </a:p>
+          <a:p>
+            <a:r>
+              <a:rPr lang="en-US" dirty="0"/>
+              <a:t>SoC</a:t>
+            </a:r>
+          </a:p>
+          <a:p>
+            <a:r>
+              <a:rPr lang="en-US" dirty="0" err="1"/>
+              <a:t>uC-uP</a:t>
+            </a:r>
+            <a:endParaRPr lang="en-US" dirty="0"/>
+          </a:p>
+        </p:txBody>
+      </p:sp>
+      <p:sp>
+        <p:nvSpPr>
+          <p:cNvPr id="7" name="Rectangle 6">
+            <a:extLst>
+              <a:ext uri="{FF2B5EF4-FFF2-40B4-BE49-F238E27FC236}">
+                <a16:creationId xmlns:a16="http://schemas.microsoft.com/office/drawing/2014/main" id="{5E496834-3903-4ED1-9614-9E03C52F0741}"/>
+              </a:ext>
+            </a:extLst>
+          </p:cNvPr>
+          <p:cNvSpPr/>
+          <p:nvPr/>
+        </p:nvSpPr>
+        <p:spPr>
+          <a:xfrm>
+            <a:off x="6574703" y="1777855"/>
+            <a:ext cx="1473663" cy="1177254"/>
+          </a:xfrm>
+          <a:prstGeom prst="rect">
+            <a:avLst/>
+          </a:prstGeom>
+          <a:solidFill>
+            <a:srgbClr val="FFC000"/>
+          </a:solidFill>
+        </p:spPr>
+        <p:style>
+          <a:lnRef idx="2">
+            <a:schemeClr val="accent1">
+              <a:shade val="50000"/>
+            </a:schemeClr>
+          </a:lnRef>
+          <a:fillRef idx="1">
+            <a:schemeClr val="accent1"/>
+          </a:fillRef>
+          <a:effectRef idx="0">
+            <a:schemeClr val="accent1"/>
+          </a:effectRef>
+          <a:fontRef idx="minor">
+            <a:schemeClr val="lt1"/>
+          </a:fontRef>
+        </p:style>
+        <p:txBody>
+          <a:bodyPr rtlCol="0" anchor="ctr"/>
+          <a:lstStyle/>
+          <a:p>
+            <a:pPr algn="ctr"/>
+            <a:r>
+              <a:rPr lang="en-US" dirty="0"/>
+              <a:t>I/O</a:t>
+            </a:r>
+          </a:p>
+        </p:txBody>
+      </p:sp>
+      <p:sp>
+        <p:nvSpPr>
+          <p:cNvPr id="8" name="Rectangle 7">
+            <a:extLst>
+              <a:ext uri="{FF2B5EF4-FFF2-40B4-BE49-F238E27FC236}">
+                <a16:creationId xmlns:a16="http://schemas.microsoft.com/office/drawing/2014/main" id="{DBA68014-48F9-4D77-9AE4-457D3F0CF7F1}"/>
+              </a:ext>
+            </a:extLst>
+          </p:cNvPr>
+          <p:cNvSpPr/>
+          <p:nvPr/>
+        </p:nvSpPr>
+        <p:spPr>
+          <a:xfrm>
+            <a:off x="6613323" y="3459619"/>
+            <a:ext cx="1473663" cy="1177254"/>
+          </a:xfrm>
+          <a:prstGeom prst="rect">
+            <a:avLst/>
+          </a:prstGeom>
+          <a:solidFill>
+            <a:srgbClr val="FFC000"/>
+          </a:solidFill>
+        </p:spPr>
+        <p:style>
+          <a:lnRef idx="2">
+            <a:schemeClr val="accent1">
+              <a:shade val="50000"/>
+            </a:schemeClr>
+          </a:lnRef>
+          <a:fillRef idx="1">
+            <a:schemeClr val="accent1"/>
+          </a:fillRef>
+          <a:effectRef idx="0">
+            <a:schemeClr val="accent1"/>
+          </a:effectRef>
+          <a:fontRef idx="minor">
+            <a:schemeClr val="lt1"/>
+          </a:fontRef>
+        </p:style>
+        <p:txBody>
+          <a:bodyPr rtlCol="0" anchor="ctr"/>
+          <a:lstStyle/>
+          <a:p>
+            <a:pPr algn="ctr"/>
+            <a:r>
+              <a:rPr lang="en-US" dirty="0"/>
+              <a:t>I/O</a:t>
+            </a:r>
+          </a:p>
+        </p:txBody>
+      </p:sp>
+      <p:sp>
+        <p:nvSpPr>
+          <p:cNvPr id="9" name="Rectangle 8">
+            <a:extLst>
+              <a:ext uri="{FF2B5EF4-FFF2-40B4-BE49-F238E27FC236}">
+                <a16:creationId xmlns:a16="http://schemas.microsoft.com/office/drawing/2014/main" id="{B6EA9A58-D0F2-4BFD-A1F1-533543FA61DB}"/>
+              </a:ext>
+            </a:extLst>
+          </p:cNvPr>
+          <p:cNvSpPr/>
+          <p:nvPr/>
+        </p:nvSpPr>
+        <p:spPr>
+          <a:xfrm>
+            <a:off x="6613323" y="5234731"/>
+            <a:ext cx="1473663" cy="1177254"/>
+          </a:xfrm>
+          <a:prstGeom prst="rect">
+            <a:avLst/>
+          </a:prstGeom>
+          <a:solidFill>
+            <a:srgbClr val="FFC000"/>
+          </a:solidFill>
+        </p:spPr>
+        <p:style>
+          <a:lnRef idx="2">
+            <a:schemeClr val="accent1">
+              <a:shade val="50000"/>
+            </a:schemeClr>
+          </a:lnRef>
+          <a:fillRef idx="1">
+            <a:schemeClr val="accent1"/>
+          </a:fillRef>
+          <a:effectRef idx="0">
+            <a:schemeClr val="accent1"/>
+          </a:effectRef>
+          <a:fontRef idx="minor">
+            <a:schemeClr val="lt1"/>
+          </a:fontRef>
+        </p:style>
+        <p:txBody>
+          <a:bodyPr rtlCol="0" anchor="ctr"/>
+          <a:lstStyle/>
+          <a:p>
+            <a:pPr algn="ctr"/>
+            <a:r>
+              <a:rPr lang="en-US" dirty="0"/>
+              <a:t>I/O</a:t>
+            </a:r>
+          </a:p>
+        </p:txBody>
+      </p:sp>
+      <p:sp>
+        <p:nvSpPr>
+          <p:cNvPr id="10" name="TextBox 9">
+            <a:extLst>
+              <a:ext uri="{FF2B5EF4-FFF2-40B4-BE49-F238E27FC236}">
+                <a16:creationId xmlns:a16="http://schemas.microsoft.com/office/drawing/2014/main" id="{F66F6055-282D-4340-88A5-215C968797CA}"/>
+              </a:ext>
+            </a:extLst>
+          </p:cNvPr>
+          <p:cNvSpPr txBox="1"/>
+          <p:nvPr/>
+        </p:nvSpPr>
+        <p:spPr>
+          <a:xfrm>
+            <a:off x="2374084" y="2094450"/>
+            <a:ext cx="1115909" cy="369332"/>
+          </a:xfrm>
+          <a:prstGeom prst="rect">
+            <a:avLst/>
+          </a:prstGeom>
+          <a:noFill/>
+        </p:spPr>
+        <p:txBody>
+          <a:bodyPr wrap="square" rtlCol="0">
+            <a:spAutoFit/>
+          </a:bodyPr>
+          <a:lstStyle/>
+          <a:p>
+            <a:r>
+              <a:rPr lang="en-US" dirty="0"/>
+              <a:t>SoC</a:t>
+            </a:r>
+          </a:p>
+        </p:txBody>
+      </p:sp>
+      <p:sp>
+        <p:nvSpPr>
+          <p:cNvPr id="14" name="Rectangle 13">
+            <a:extLst>
+              <a:ext uri="{FF2B5EF4-FFF2-40B4-BE49-F238E27FC236}">
+                <a16:creationId xmlns:a16="http://schemas.microsoft.com/office/drawing/2014/main" id="{70E7B39F-2065-48EE-8C73-8937FAC8CEBC}"/>
+              </a:ext>
+            </a:extLst>
+          </p:cNvPr>
+          <p:cNvSpPr/>
+          <p:nvPr/>
+        </p:nvSpPr>
+        <p:spPr>
+          <a:xfrm>
+            <a:off x="3193846" y="3684638"/>
+            <a:ext cx="1258348" cy="757106"/>
+          </a:xfrm>
+          <a:prstGeom prst="rect">
+            <a:avLst/>
+          </a:prstGeom>
+        </p:spPr>
+        <p:style>
+          <a:lnRef idx="2">
+            <a:schemeClr val="accent2">
+              <a:shade val="50000"/>
+            </a:schemeClr>
+          </a:lnRef>
+          <a:fillRef idx="1">
+            <a:schemeClr val="accent2"/>
+          </a:fillRef>
+          <a:effectRef idx="0">
+            <a:schemeClr val="accent2"/>
+          </a:effectRef>
+          <a:fontRef idx="minor">
+            <a:schemeClr val="lt1"/>
+          </a:fontRef>
+        </p:style>
+        <p:txBody>
+          <a:bodyPr rtlCol="0" anchor="ctr"/>
+          <a:lstStyle/>
+          <a:p>
+            <a:pPr algn="ctr"/>
+            <a:r>
+              <a:rPr lang="en-US" dirty="0"/>
+              <a:t>NVIC</a:t>
+            </a:r>
+          </a:p>
+        </p:txBody>
+      </p:sp>
+      <p:sp>
+        <p:nvSpPr>
+          <p:cNvPr id="17" name="TextBox 16">
+            <a:extLst>
+              <a:ext uri="{FF2B5EF4-FFF2-40B4-BE49-F238E27FC236}">
+                <a16:creationId xmlns:a16="http://schemas.microsoft.com/office/drawing/2014/main" id="{5A328F0E-F061-4E9B-9C52-D1E2616E602D}"/>
+              </a:ext>
+            </a:extLst>
+          </p:cNvPr>
+          <p:cNvSpPr txBox="1"/>
+          <p:nvPr/>
+        </p:nvSpPr>
+        <p:spPr>
+          <a:xfrm>
+            <a:off x="1317072" y="5076983"/>
+            <a:ext cx="3112315" cy="646331"/>
+          </a:xfrm>
+          <a:prstGeom prst="rect">
+            <a:avLst/>
+          </a:prstGeom>
+          <a:noFill/>
+        </p:spPr>
+        <p:txBody>
+          <a:bodyPr wrap="square" rtlCol="0">
+            <a:spAutoFit/>
+          </a:bodyPr>
+          <a:lstStyle/>
+          <a:p>
+            <a:r>
+              <a:rPr lang="en-US" dirty="0"/>
+              <a:t>STM32F103: 1 core</a:t>
+            </a:r>
+          </a:p>
+          <a:p>
+            <a:r>
+              <a:rPr lang="en-US" dirty="0"/>
+              <a:t>STM newest: multi-core</a:t>
+            </a:r>
+          </a:p>
+        </p:txBody>
+      </p:sp>
+      <p:sp>
+        <p:nvSpPr>
+          <p:cNvPr id="18" name="Rectangle 17">
+            <a:extLst>
+              <a:ext uri="{FF2B5EF4-FFF2-40B4-BE49-F238E27FC236}">
+                <a16:creationId xmlns:a16="http://schemas.microsoft.com/office/drawing/2014/main" id="{226AA0BB-25BE-40EF-BC90-1ABC575EB515}"/>
+              </a:ext>
+            </a:extLst>
+          </p:cNvPr>
+          <p:cNvSpPr/>
+          <p:nvPr/>
+        </p:nvSpPr>
+        <p:spPr>
+          <a:xfrm>
+            <a:off x="3299407" y="2702513"/>
+            <a:ext cx="1047225" cy="757106"/>
+          </a:xfrm>
+          <a:prstGeom prst="rect">
+            <a:avLst/>
+          </a:prstGeom>
+        </p:spPr>
+        <p:style>
+          <a:lnRef idx="2">
+            <a:schemeClr val="accent6">
+              <a:shade val="50000"/>
+            </a:schemeClr>
+          </a:lnRef>
+          <a:fillRef idx="1">
+            <a:schemeClr val="accent6"/>
+          </a:fillRef>
+          <a:effectRef idx="0">
+            <a:schemeClr val="accent6"/>
+          </a:effectRef>
+          <a:fontRef idx="minor">
+            <a:schemeClr val="lt1"/>
+          </a:fontRef>
+        </p:style>
+        <p:txBody>
+          <a:bodyPr rtlCol="0" anchor="ctr"/>
+          <a:lstStyle/>
+          <a:p>
+            <a:pPr algn="ctr"/>
+            <a:r>
+              <a:rPr lang="en-US" dirty="0"/>
+              <a:t>Core</a:t>
+            </a:r>
+          </a:p>
+        </p:txBody>
+      </p:sp>
+      <p:sp>
+        <p:nvSpPr>
+          <p:cNvPr id="2" name="Rectangle 1">
+            <a:extLst>
+              <a:ext uri="{FF2B5EF4-FFF2-40B4-BE49-F238E27FC236}">
+                <a16:creationId xmlns:a16="http://schemas.microsoft.com/office/drawing/2014/main" id="{2376D7A9-7FF3-4084-B5BB-229F10A2C7E1}"/>
+              </a:ext>
+            </a:extLst>
+          </p:cNvPr>
+          <p:cNvSpPr/>
+          <p:nvPr/>
+        </p:nvSpPr>
+        <p:spPr>
+          <a:xfrm>
+            <a:off x="6194920" y="2233549"/>
+            <a:ext cx="371914" cy="265866"/>
+          </a:xfrm>
+          <a:prstGeom prst="rect">
+            <a:avLst/>
+          </a:prstGeom>
+        </p:spPr>
+        <p:style>
+          <a:lnRef idx="1">
+            <a:schemeClr val="accent6"/>
+          </a:lnRef>
+          <a:fillRef idx="2">
+            <a:schemeClr val="accent6"/>
+          </a:fillRef>
+          <a:effectRef idx="1">
+            <a:schemeClr val="accent6"/>
+          </a:effectRef>
+          <a:fontRef idx="minor">
+            <a:schemeClr val="dk1"/>
+          </a:fontRef>
+        </p:style>
+        <p:txBody>
+          <a:bodyPr rtlCol="0" anchor="ctr"/>
+          <a:lstStyle/>
+          <a:p>
+            <a:pPr algn="ctr"/>
+            <a:r>
+              <a:rPr lang="en-US" dirty="0"/>
+              <a:t>1</a:t>
+            </a:r>
+          </a:p>
+        </p:txBody>
+      </p:sp>
+      <p:sp>
+        <p:nvSpPr>
+          <p:cNvPr id="20" name="Rectangle 19">
+            <a:extLst>
+              <a:ext uri="{FF2B5EF4-FFF2-40B4-BE49-F238E27FC236}">
+                <a16:creationId xmlns:a16="http://schemas.microsoft.com/office/drawing/2014/main" id="{E3D0D55F-CE63-4680-BF1A-FCEF39E8F568}"/>
+              </a:ext>
+            </a:extLst>
+          </p:cNvPr>
+          <p:cNvSpPr/>
+          <p:nvPr/>
+        </p:nvSpPr>
+        <p:spPr>
+          <a:xfrm>
+            <a:off x="6148431" y="3861512"/>
+            <a:ext cx="464892" cy="265866"/>
+          </a:xfrm>
+          <a:prstGeom prst="rect">
+            <a:avLst/>
+          </a:prstGeom>
+        </p:spPr>
+        <p:style>
+          <a:lnRef idx="1">
+            <a:schemeClr val="accent6"/>
+          </a:lnRef>
+          <a:fillRef idx="2">
+            <a:schemeClr val="accent6"/>
+          </a:fillRef>
+          <a:effectRef idx="1">
+            <a:schemeClr val="accent6"/>
+          </a:effectRef>
+          <a:fontRef idx="minor">
+            <a:schemeClr val="dk1"/>
+          </a:fontRef>
+        </p:style>
+        <p:txBody>
+          <a:bodyPr rtlCol="0" anchor="ctr"/>
+          <a:lstStyle/>
+          <a:p>
+            <a:pPr algn="ctr"/>
+            <a:r>
+              <a:rPr lang="en-US" dirty="0"/>
+              <a:t>5</a:t>
+            </a:r>
+          </a:p>
+        </p:txBody>
+      </p:sp>
+      <p:sp>
+        <p:nvSpPr>
+          <p:cNvPr id="21" name="Rectangle 20">
+            <a:extLst>
+              <a:ext uri="{FF2B5EF4-FFF2-40B4-BE49-F238E27FC236}">
+                <a16:creationId xmlns:a16="http://schemas.microsoft.com/office/drawing/2014/main" id="{CBBF86F9-2B47-4A4A-8EFF-5B9C85C3AEA6}"/>
+              </a:ext>
+            </a:extLst>
+          </p:cNvPr>
+          <p:cNvSpPr/>
+          <p:nvPr/>
+        </p:nvSpPr>
+        <p:spPr>
+          <a:xfrm>
+            <a:off x="6241409" y="5823358"/>
+            <a:ext cx="371914" cy="265866"/>
+          </a:xfrm>
+          <a:prstGeom prst="rect">
+            <a:avLst/>
+          </a:prstGeom>
+        </p:spPr>
+        <p:style>
+          <a:lnRef idx="1">
+            <a:schemeClr val="accent6"/>
+          </a:lnRef>
+          <a:fillRef idx="2">
+            <a:schemeClr val="accent6"/>
+          </a:fillRef>
+          <a:effectRef idx="1">
+            <a:schemeClr val="accent6"/>
+          </a:effectRef>
+          <a:fontRef idx="minor">
+            <a:schemeClr val="dk1"/>
+          </a:fontRef>
+        </p:style>
+        <p:txBody>
+          <a:bodyPr rtlCol="0" anchor="ctr"/>
+          <a:lstStyle/>
+          <a:p>
+            <a:pPr algn="ctr"/>
+            <a:r>
+              <a:rPr lang="en-US" dirty="0"/>
+              <a:t>4</a:t>
+            </a:r>
+          </a:p>
+        </p:txBody>
+      </p:sp>
+      <p:cxnSp>
+        <p:nvCxnSpPr>
+          <p:cNvPr id="11" name="Straight Arrow Connector 10">
+            <a:extLst>
+              <a:ext uri="{FF2B5EF4-FFF2-40B4-BE49-F238E27FC236}">
+                <a16:creationId xmlns:a16="http://schemas.microsoft.com/office/drawing/2014/main" id="{9CEC217B-10F7-40C7-9E6B-70079FB571D0}"/>
+              </a:ext>
+            </a:extLst>
+          </p:cNvPr>
+          <p:cNvCxnSpPr>
+            <a:cxnSpLocks/>
+            <a:stCxn id="2" idx="1"/>
+            <a:endCxn id="14" idx="3"/>
+          </p:cNvCxnSpPr>
+          <p:nvPr/>
+        </p:nvCxnSpPr>
+        <p:spPr>
+          <a:xfrm flipH="1">
+            <a:off x="4452194" y="2366482"/>
+            <a:ext cx="1742726" cy="1696709"/>
+          </a:xfrm>
+          <a:prstGeom prst="straightConnector1">
+            <a:avLst/>
+          </a:prstGeom>
+          <a:ln>
+            <a:tailEnd type="triangle"/>
+          </a:ln>
+        </p:spPr>
+        <p:style>
+          <a:lnRef idx="3">
+            <a:schemeClr val="dk1"/>
+          </a:lnRef>
+          <a:fillRef idx="0">
+            <a:schemeClr val="dk1"/>
+          </a:fillRef>
+          <a:effectRef idx="2">
+            <a:schemeClr val="dk1"/>
+          </a:effectRef>
+          <a:fontRef idx="minor">
+            <a:schemeClr val="tx1"/>
+          </a:fontRef>
+        </p:style>
+      </p:cxnSp>
+      <p:cxnSp>
+        <p:nvCxnSpPr>
+          <p:cNvPr id="22" name="Straight Arrow Connector 21">
+            <a:extLst>
+              <a:ext uri="{FF2B5EF4-FFF2-40B4-BE49-F238E27FC236}">
+                <a16:creationId xmlns:a16="http://schemas.microsoft.com/office/drawing/2014/main" id="{9D95D112-A3D4-4535-886F-7FF740D2D4B9}"/>
+              </a:ext>
+            </a:extLst>
+          </p:cNvPr>
+          <p:cNvCxnSpPr>
+            <a:cxnSpLocks/>
+            <a:stCxn id="20" idx="1"/>
+            <a:endCxn id="14" idx="3"/>
+          </p:cNvCxnSpPr>
+          <p:nvPr/>
+        </p:nvCxnSpPr>
+        <p:spPr>
+          <a:xfrm flipH="1">
+            <a:off x="4452194" y="3994445"/>
+            <a:ext cx="1696237" cy="68746"/>
+          </a:xfrm>
+          <a:prstGeom prst="straightConnector1">
+            <a:avLst/>
+          </a:prstGeom>
+          <a:ln>
+            <a:tailEnd type="triangle"/>
+          </a:ln>
+        </p:spPr>
+        <p:style>
+          <a:lnRef idx="3">
+            <a:schemeClr val="dk1"/>
+          </a:lnRef>
+          <a:fillRef idx="0">
+            <a:schemeClr val="dk1"/>
+          </a:fillRef>
+          <a:effectRef idx="2">
+            <a:schemeClr val="dk1"/>
+          </a:effectRef>
+          <a:fontRef idx="minor">
+            <a:schemeClr val="tx1"/>
+          </a:fontRef>
+        </p:style>
+      </p:cxnSp>
+      <p:cxnSp>
+        <p:nvCxnSpPr>
+          <p:cNvPr id="24" name="Straight Arrow Connector 23">
+            <a:extLst>
+              <a:ext uri="{FF2B5EF4-FFF2-40B4-BE49-F238E27FC236}">
+                <a16:creationId xmlns:a16="http://schemas.microsoft.com/office/drawing/2014/main" id="{1119FEF4-9419-4425-B04F-A6D0174A182E}"/>
+              </a:ext>
+            </a:extLst>
+          </p:cNvPr>
+          <p:cNvCxnSpPr>
+            <a:stCxn id="21" idx="2"/>
+            <a:endCxn id="14" idx="3"/>
+          </p:cNvCxnSpPr>
+          <p:nvPr/>
+        </p:nvCxnSpPr>
+        <p:spPr>
+          <a:xfrm flipH="1" flipV="1">
+            <a:off x="4452194" y="4063191"/>
+            <a:ext cx="1975172" cy="2026033"/>
+          </a:xfrm>
+          <a:prstGeom prst="straightConnector1">
+            <a:avLst/>
+          </a:prstGeom>
+          <a:ln>
+            <a:tailEnd type="triangle"/>
+          </a:ln>
+        </p:spPr>
+        <p:style>
+          <a:lnRef idx="3">
+            <a:schemeClr val="dk1"/>
+          </a:lnRef>
+          <a:fillRef idx="0">
+            <a:schemeClr val="dk1"/>
+          </a:fillRef>
+          <a:effectRef idx="2">
+            <a:schemeClr val="dk1"/>
+          </a:effectRef>
+          <a:fontRef idx="minor">
+            <a:schemeClr val="tx1"/>
+          </a:fontRef>
+        </p:style>
+      </p:cxnSp>
+      <p:sp>
+        <p:nvSpPr>
+          <p:cNvPr id="28" name="TextBox 27">
+            <a:extLst>
+              <a:ext uri="{FF2B5EF4-FFF2-40B4-BE49-F238E27FC236}">
+                <a16:creationId xmlns:a16="http://schemas.microsoft.com/office/drawing/2014/main" id="{8F3EB1FC-6471-4290-AEA3-64B3782835BA}"/>
+              </a:ext>
+            </a:extLst>
+          </p:cNvPr>
+          <p:cNvSpPr txBox="1"/>
+          <p:nvPr/>
+        </p:nvSpPr>
+        <p:spPr>
+          <a:xfrm>
+            <a:off x="8239388" y="2102684"/>
+            <a:ext cx="1473663" cy="369332"/>
+          </a:xfrm>
+          <a:prstGeom prst="rect">
+            <a:avLst/>
+          </a:prstGeom>
+          <a:noFill/>
+        </p:spPr>
+        <p:txBody>
+          <a:bodyPr wrap="square" rtlCol="0">
+            <a:spAutoFit/>
+          </a:bodyPr>
+          <a:lstStyle/>
+          <a:p>
+            <a:r>
+              <a:rPr lang="en-US" dirty="0"/>
+              <a:t>P1_Handler</a:t>
+            </a:r>
+          </a:p>
+        </p:txBody>
+      </p:sp>
+      <p:sp>
+        <p:nvSpPr>
+          <p:cNvPr id="29" name="TextBox 28">
+            <a:extLst>
+              <a:ext uri="{FF2B5EF4-FFF2-40B4-BE49-F238E27FC236}">
+                <a16:creationId xmlns:a16="http://schemas.microsoft.com/office/drawing/2014/main" id="{E143894E-DE04-48DA-976F-1B3C9B833882}"/>
+              </a:ext>
+            </a:extLst>
+          </p:cNvPr>
+          <p:cNvSpPr txBox="1"/>
+          <p:nvPr/>
+        </p:nvSpPr>
+        <p:spPr>
+          <a:xfrm>
+            <a:off x="8272943" y="3739868"/>
+            <a:ext cx="1473663" cy="369332"/>
+          </a:xfrm>
+          <a:prstGeom prst="rect">
+            <a:avLst/>
+          </a:prstGeom>
+          <a:noFill/>
+        </p:spPr>
+        <p:txBody>
+          <a:bodyPr wrap="square" rtlCol="0">
+            <a:spAutoFit/>
+          </a:bodyPr>
+          <a:lstStyle/>
+          <a:p>
+            <a:r>
+              <a:rPr lang="en-US" dirty="0"/>
+              <a:t>P2_Handler</a:t>
+            </a:r>
+          </a:p>
+        </p:txBody>
+      </p:sp>
+      <p:sp>
+        <p:nvSpPr>
+          <p:cNvPr id="30" name="TextBox 29">
+            <a:extLst>
+              <a:ext uri="{FF2B5EF4-FFF2-40B4-BE49-F238E27FC236}">
+                <a16:creationId xmlns:a16="http://schemas.microsoft.com/office/drawing/2014/main" id="{AC8A009A-3D99-4A24-BCB7-375BD69448E9}"/>
+              </a:ext>
+            </a:extLst>
+          </p:cNvPr>
+          <p:cNvSpPr txBox="1"/>
+          <p:nvPr/>
+        </p:nvSpPr>
+        <p:spPr>
+          <a:xfrm>
+            <a:off x="8239388" y="5586959"/>
+            <a:ext cx="1473663" cy="369332"/>
+          </a:xfrm>
+          <a:prstGeom prst="rect">
+            <a:avLst/>
+          </a:prstGeom>
+          <a:noFill/>
+        </p:spPr>
+        <p:txBody>
+          <a:bodyPr wrap="square" rtlCol="0">
+            <a:spAutoFit/>
+          </a:bodyPr>
+          <a:lstStyle/>
+          <a:p>
+            <a:r>
+              <a:rPr lang="en-US" dirty="0"/>
+              <a:t>P3_Handler</a:t>
+            </a:r>
+          </a:p>
+        </p:txBody>
+      </p:sp>
+      <p:cxnSp>
+        <p:nvCxnSpPr>
+          <p:cNvPr id="32" name="Straight Arrow Connector 31">
+            <a:extLst>
+              <a:ext uri="{FF2B5EF4-FFF2-40B4-BE49-F238E27FC236}">
+                <a16:creationId xmlns:a16="http://schemas.microsoft.com/office/drawing/2014/main" id="{02D84BC4-080F-4444-A01D-C84B22BFA4B6}"/>
+              </a:ext>
+            </a:extLst>
+          </p:cNvPr>
+          <p:cNvCxnSpPr>
+            <a:stCxn id="14" idx="0"/>
+            <a:endCxn id="18" idx="2"/>
+          </p:cNvCxnSpPr>
+          <p:nvPr/>
+        </p:nvCxnSpPr>
+        <p:spPr>
+          <a:xfrm flipV="1">
+            <a:off x="3823020" y="3459619"/>
+            <a:ext cx="0" cy="225019"/>
+          </a:xfrm>
+          <a:prstGeom prst="straightConnector1">
+            <a:avLst/>
+          </a:prstGeom>
+          <a:ln>
+            <a:tailEnd type="triangle"/>
+          </a:ln>
+        </p:spPr>
+        <p:style>
+          <a:lnRef idx="3">
+            <a:schemeClr val="dk1"/>
+          </a:lnRef>
+          <a:fillRef idx="0">
+            <a:schemeClr val="dk1"/>
+          </a:fillRef>
+          <a:effectRef idx="2">
+            <a:schemeClr val="dk1"/>
+          </a:effectRef>
+          <a:fontRef idx="minor">
+            <a:schemeClr val="tx1"/>
+          </a:fontRef>
+        </p:style>
+      </p:cxnSp>
+      <p:cxnSp>
+        <p:nvCxnSpPr>
+          <p:cNvPr id="36" name="Straight Arrow Connector 35">
+            <a:extLst>
+              <a:ext uri="{FF2B5EF4-FFF2-40B4-BE49-F238E27FC236}">
+                <a16:creationId xmlns:a16="http://schemas.microsoft.com/office/drawing/2014/main" id="{1B63E73C-300D-4EF3-9958-7DE551CC2B34}"/>
+              </a:ext>
+            </a:extLst>
+          </p:cNvPr>
+          <p:cNvCxnSpPr>
+            <a:cxnSpLocks/>
+          </p:cNvCxnSpPr>
+          <p:nvPr/>
+        </p:nvCxnSpPr>
+        <p:spPr>
+          <a:xfrm flipV="1">
+            <a:off x="4290972" y="2304309"/>
+            <a:ext cx="4000149" cy="730646"/>
+          </a:xfrm>
+          <a:prstGeom prst="straightConnector1">
+            <a:avLst/>
+          </a:prstGeom>
+          <a:ln>
+            <a:tailEnd type="triangle"/>
+          </a:ln>
+        </p:spPr>
+        <p:style>
+          <a:lnRef idx="3">
+            <a:schemeClr val="dk1"/>
+          </a:lnRef>
+          <a:fillRef idx="0">
+            <a:schemeClr val="dk1"/>
+          </a:fillRef>
+          <a:effectRef idx="2">
+            <a:schemeClr val="dk1"/>
+          </a:effectRef>
+          <a:fontRef idx="minor">
+            <a:schemeClr val="tx1"/>
+          </a:fontRef>
+        </p:style>
+      </p:cxnSp>
+      <p:sp>
+        <p:nvSpPr>
+          <p:cNvPr id="52" name="TextBox 51">
+            <a:extLst>
+              <a:ext uri="{FF2B5EF4-FFF2-40B4-BE49-F238E27FC236}">
+                <a16:creationId xmlns:a16="http://schemas.microsoft.com/office/drawing/2014/main" id="{BED88AB3-4899-4EA1-B3A5-A90782B54932}"/>
+              </a:ext>
+            </a:extLst>
+          </p:cNvPr>
+          <p:cNvSpPr txBox="1"/>
+          <p:nvPr/>
+        </p:nvSpPr>
+        <p:spPr>
+          <a:xfrm>
+            <a:off x="4429387" y="553673"/>
+            <a:ext cx="5561901" cy="369332"/>
+          </a:xfrm>
+          <a:prstGeom prst="rect">
+            <a:avLst/>
+          </a:prstGeom>
+          <a:noFill/>
+        </p:spPr>
+        <p:txBody>
+          <a:bodyPr wrap="square" rtlCol="0">
+            <a:spAutoFit/>
+          </a:bodyPr>
+          <a:lstStyle/>
+          <a:p>
+            <a:r>
+              <a:rPr lang="en-US" dirty="0"/>
+              <a:t>NVIC = nested vector interrupt controller</a:t>
+            </a:r>
+          </a:p>
+        </p:txBody>
+      </p:sp>
+      <p:sp>
+        <p:nvSpPr>
+          <p:cNvPr id="55" name="TextBox 54">
+            <a:extLst>
+              <a:ext uri="{FF2B5EF4-FFF2-40B4-BE49-F238E27FC236}">
+                <a16:creationId xmlns:a16="http://schemas.microsoft.com/office/drawing/2014/main" id="{97630B76-7EB3-476D-AB4F-20AE31196EFF}"/>
+              </a:ext>
+            </a:extLst>
+          </p:cNvPr>
+          <p:cNvSpPr txBox="1"/>
+          <p:nvPr/>
+        </p:nvSpPr>
+        <p:spPr>
+          <a:xfrm>
+            <a:off x="9187170" y="818364"/>
+            <a:ext cx="1777241" cy="369332"/>
+          </a:xfrm>
+          <a:prstGeom prst="rect">
+            <a:avLst/>
+          </a:prstGeom>
+          <a:noFill/>
+        </p:spPr>
+        <p:txBody>
+          <a:bodyPr wrap="square" rtlCol="0">
+            <a:spAutoFit/>
+          </a:bodyPr>
+          <a:lstStyle/>
+          <a:p>
+            <a:r>
+              <a:rPr lang="en-US" dirty="0"/>
+              <a:t>P0_Handler</a:t>
+            </a:r>
+          </a:p>
+        </p:txBody>
+      </p:sp>
+      <p:cxnSp>
+        <p:nvCxnSpPr>
+          <p:cNvPr id="57" name="Straight Arrow Connector 56">
+            <a:extLst>
+              <a:ext uri="{FF2B5EF4-FFF2-40B4-BE49-F238E27FC236}">
+                <a16:creationId xmlns:a16="http://schemas.microsoft.com/office/drawing/2014/main" id="{F6E62821-110F-4E2D-B24A-08CA8A17425F}"/>
+              </a:ext>
+            </a:extLst>
+          </p:cNvPr>
+          <p:cNvCxnSpPr/>
+          <p:nvPr/>
+        </p:nvCxnSpPr>
+        <p:spPr>
+          <a:xfrm flipV="1">
+            <a:off x="9381517" y="1169060"/>
+            <a:ext cx="198711" cy="977710"/>
+          </a:xfrm>
+          <a:prstGeom prst="straightConnector1">
+            <a:avLst/>
+          </a:prstGeom>
+          <a:ln>
+            <a:tailEnd type="triangle"/>
+          </a:ln>
+        </p:spPr>
+        <p:style>
+          <a:lnRef idx="3">
+            <a:schemeClr val="dk1"/>
+          </a:lnRef>
+          <a:fillRef idx="0">
+            <a:schemeClr val="dk1"/>
+          </a:fillRef>
+          <a:effectRef idx="2">
+            <a:schemeClr val="dk1"/>
+          </a:effectRef>
+          <a:fontRef idx="minor">
+            <a:schemeClr val="tx1"/>
+          </a:fontRef>
+        </p:style>
+      </p:cxnSp>
+    </p:spTree>
+    <p:extLst>
+      <p:ext uri="{BB962C8B-B14F-4D97-AF65-F5344CB8AC3E}">
+        <p14:creationId xmlns:p14="http://schemas.microsoft.com/office/powerpoint/2010/main" val="224127136"/>
+      </p:ext>
+    </p:extLst>
+  </p:cSld>
+  <p:clrMapOvr>
+    <a:masterClrMapping/>
+  </p:clrMapOvr>
+</p:sld>
+</file>
+
+<file path=ppt/slides/slide5.xml><?xml version="1.0" encoding="utf-8"?>
+<p:sld xmlns:a="http://schemas.openxmlformats.org/drawingml/2006/main" xmlns:r="http://schemas.openxmlformats.org/officeDocument/2006/relationships" xmlns:p="http://schemas.openxmlformats.org/presentationml/2006/main">
+  <p:cSld>
+    <p:spTree>
+      <p:nvGrpSpPr>
         <p:cNvPr id="1" name="">
           <a:extLst>
             <a:ext uri="{FF2B5EF4-FFF2-40B4-BE49-F238E27FC236}">
@@ -3860,7 +5604,7 @@
           <a:p>
             <a:pPr algn="ctr"/>
             <a:r>
-              <a:rPr lang="en-US"/>
+              <a:rPr lang="en-US" dirty="0"/>
               <a:t>CPU</a:t>
             </a:r>
           </a:p>
@@ -4119,7 +5863,7 @@
         </p:nvSpPr>
         <p:spPr>
           <a:xfrm>
-            <a:off x="1104452" y="5336005"/>
+            <a:off x="1121298" y="5306437"/>
             <a:ext cx="784733" cy="763239"/>
           </a:xfrm>
           <a:prstGeom prst="rect">
@@ -4210,8 +5954,8 @@
         </p:nvCxnSpPr>
         <p:spPr>
           <a:xfrm>
-            <a:off x="1889185" y="5717625"/>
-            <a:ext cx="1246873" cy="1690"/>
+            <a:off x="1906031" y="5688057"/>
+            <a:ext cx="1230027" cy="31258"/>
           </a:xfrm>
           <a:prstGeom prst="line">
             <a:avLst/>
@@ -4250,8 +5994,8 @@
         </p:nvCxnSpPr>
         <p:spPr>
           <a:xfrm flipV="1">
-            <a:off x="1889185" y="4969015"/>
-            <a:ext cx="1445281" cy="748610"/>
+            <a:off x="1906031" y="4969015"/>
+            <a:ext cx="1428435" cy="719042"/>
           </a:xfrm>
           <a:prstGeom prst="line">
             <a:avLst/>
@@ -4290,8 +6034,8 @@
         </p:nvCxnSpPr>
         <p:spPr>
           <a:xfrm flipH="1" flipV="1">
-            <a:off x="1889185" y="5717625"/>
-            <a:ext cx="1246873" cy="710238"/>
+            <a:off x="1906031" y="5688057"/>
+            <a:ext cx="1230027" cy="739806"/>
           </a:xfrm>
           <a:prstGeom prst="straightConnector1">
             <a:avLst/>
@@ -4333,8 +6077,8 @@
         </p:nvCxnSpPr>
         <p:spPr>
           <a:xfrm flipV="1">
-            <a:off x="1496819" y="4152796"/>
-            <a:ext cx="190500" cy="1183209"/>
+            <a:off x="1513665" y="4152796"/>
+            <a:ext cx="173654" cy="1153641"/>
           </a:xfrm>
           <a:prstGeom prst="line">
             <a:avLst/>
@@ -4413,7 +6157,7 @@
         </p:nvSpPr>
         <p:spPr>
           <a:xfrm>
-            <a:off x="4399472" y="4168894"/>
+            <a:off x="4399471" y="4126908"/>
             <a:ext cx="405441" cy="257822"/>
           </a:xfrm>
           <a:prstGeom prst="rect">
@@ -4462,7 +6206,7 @@
         </p:nvSpPr>
         <p:spPr>
           <a:xfrm>
-            <a:off x="4473153" y="4840244"/>
+            <a:off x="4473153" y="4764283"/>
             <a:ext cx="405441" cy="257822"/>
           </a:xfrm>
           <a:prstGeom prst="rect">
@@ -4703,7 +6447,7 @@
 </p:sld>
 </file>
 
-<file path=ppt/slides/slide4.xml><?xml version="1.0" encoding="utf-8"?>
+<file path=ppt/slides/slide6.xml><?xml version="1.0" encoding="utf-8"?>
 <p:sld xmlns:a="http://schemas.openxmlformats.org/drawingml/2006/main" xmlns:r="http://schemas.openxmlformats.org/officeDocument/2006/relationships" xmlns:p="http://schemas.openxmlformats.org/presentationml/2006/main">
   <p:cSld>
     <p:spTree>
@@ -5713,7 +7457,7 @@
 </p:sld>
 </file>
 
-<file path=ppt/slides/slide5.xml><?xml version="1.0" encoding="utf-8"?>
+<file path=ppt/slides/slide7.xml><?xml version="1.0" encoding="utf-8"?>
 <p:sld xmlns:a="http://schemas.openxmlformats.org/drawingml/2006/main" xmlns:r="http://schemas.openxmlformats.org/officeDocument/2006/relationships" xmlns:p="http://schemas.openxmlformats.org/presentationml/2006/main">
   <p:cSld>
     <p:spTree>
